--- a/example/ex1/EasyIndexerSample_indexed.pptx
+++ b/example/ex1/EasyIndexerSample_indexed.pptx
@@ -22,7 +22,6 @@
     <p:sldId id="1694" r:id="rId13"/>
     <p:sldId id="1699" r:id="rId14"/>
     <p:sldId id="1700" r:id="rId15"/>
-    <p:sldId id="1701" r:id="rId16"/>
   </p:sldIdLst>
   <p:sldSz cx="12192000" cy="6858000"/>
   <p:notesSz cx="6797675" cy="9926638"/>
@@ -4307,7 +4306,7 @@
                 <a:latin typeface="BIZ UDPゴシック" panose="020B0400000000000000" pitchFamily="50" charset="-128"/>
                 <a:ea typeface="BIZ UDPゴシック" panose="020B0400000000000000" pitchFamily="50" charset="-128"/>
               </a:rPr>
-              <a:t> </a:t>
+              <a:t>#CHAPT# </a:t>
             </a:r>
             <a:r>
               <a:rPr kumimoji="1" lang="ja-JP" altLang="en-US" sz="2000" kern="0">
@@ -4327,7 +4326,7 @@
                 <a:latin typeface="BIZ UDPゴシック" panose="020B0400000000000000" pitchFamily="50" charset="-128"/>
                 <a:ea typeface="BIZ UDPゴシック" panose="020B0400000000000000" pitchFamily="50" charset="-128"/>
               </a:rPr>
-              <a:t> </a:t>
+              <a:t>#SECTION# </a:t>
             </a:r>
             <a:r>
               <a:rPr kumimoji="1" lang="ja-JP" altLang="en-US" sz="2000" kern="0">
@@ -4367,7 +4366,7 @@
                 <a:latin typeface="BIZ UDPゴシック" panose="020B0400000000000000" pitchFamily="50" charset="-128"/>
                 <a:ea typeface="BIZ UDPゴシック" panose="020B0400000000000000" pitchFamily="50" charset="-128"/>
               </a:rPr>
-              <a:t> </a:t>
+              <a:t>#CHAPT# </a:t>
             </a:r>
             <a:r>
               <a:rPr lang="ja-JP" altLang="en-US" kern="0">
@@ -4387,7 +4386,7 @@
                 <a:latin typeface="BIZ UDPゴシック" panose="020B0400000000000000" pitchFamily="50" charset="-128"/>
                 <a:ea typeface="BIZ UDPゴシック" panose="020B0400000000000000" pitchFamily="50" charset="-128"/>
               </a:rPr>
-              <a:t/>
+              <a:t>#SECTION#</a:t>
             </a:r>
             <a:r>
               <a:rPr lang="ja-JP" altLang="en-US" kern="0">
@@ -4427,7 +4426,7 @@
                 <a:latin typeface="BIZ UDPゴシック" panose="020B0400000000000000" pitchFamily="50" charset="-128"/>
                 <a:ea typeface="BIZ UDPゴシック" panose="020B0400000000000000" pitchFamily="50" charset="-128"/>
               </a:rPr>
-              <a:t> </a:t>
+              <a:t>#CHAPT# </a:t>
             </a:r>
             <a:r>
               <a:rPr lang="ja-JP" altLang="en-US" kern="0">
@@ -4457,7 +4456,7 @@
                 <a:latin typeface="BIZ UDPゴシック" panose="020B0400000000000000" pitchFamily="50" charset="-128"/>
                 <a:ea typeface="BIZ UDPゴシック" panose="020B0400000000000000" pitchFamily="50" charset="-128"/>
               </a:rPr>
-              <a:t> </a:t>
+              <a:t>#SECTION# </a:t>
             </a:r>
             <a:r>
               <a:rPr lang="ja-JP" altLang="en-US" kern="0">
@@ -4547,7 +4546,7 @@
                 <a:latin typeface="BIZ UDPゴシック" panose="020B0400000000000000" pitchFamily="50" charset="-128"/>
                 <a:ea typeface="BIZ UDPゴシック" panose="020B0400000000000000" pitchFamily="50" charset="-128"/>
               </a:rPr>
-              <a:t> </a:t>
+              <a:t>#CHAPT# </a:t>
             </a:r>
             <a:r>
               <a:rPr lang="ja-JP" altLang="en-US" kern="0">
@@ -4567,7 +4566,7 @@
                 <a:latin typeface="BIZ UDPゴシック" panose="020B0400000000000000" pitchFamily="50" charset="-128"/>
                 <a:ea typeface="BIZ UDPゴシック" panose="020B0400000000000000" pitchFamily="50" charset="-128"/>
               </a:rPr>
-              <a:t> </a:t>
+              <a:t>#SECTION# </a:t>
             </a:r>
             <a:r>
               <a:rPr lang="ja-JP" altLang="en-US" kern="0">
@@ -4712,7 +4711,7 @@
                 <a:latin typeface="BIZ UDPゴシック" panose="020B0400000000000000" pitchFamily="50" charset="-128"/>
                 <a:ea typeface="BIZ UDPゴシック" panose="020B0400000000000000" pitchFamily="50" charset="-128"/>
               </a:rPr>
-              <a:t/>
+              <a:t>#CSP# </a:t>
             </a:r>
             <a:r>
               <a:rPr kumimoji="1" lang="ja-JP" altLang="en-US" sz="2400" kern="0">
@@ -4783,7 +4782,7 @@
                 <a:latin typeface="BIZ UDPゴシック" panose="020B0400000000000000" pitchFamily="50" charset="-128"/>
                 <a:ea typeface="BIZ UDPゴシック" panose="020B0400000000000000" pitchFamily="50" charset="-128"/>
               </a:rPr>
-              <a:t/>
+              <a:t>#CSL#</a:t>
             </a:r>
             <a:endParaRPr kumimoji="1" lang="ja-JP" altLang="en-US" sz="2800" kern="0">
               <a:latin typeface="BIZ UDPゴシック" panose="020B0400000000000000" pitchFamily="50" charset="-128"/>

--- a/example/ex1/EasyIndexerSample_indexed.pptx
+++ b/example/ex1/EasyIndexerSample_indexed.pptx
@@ -2649,7 +2649,7 @@
           <a:lstStyle/>
           <a:p>
             <a:r>
-              <a:t>3.1) 山口</a:t>
+              <a:t>3.2) 山口</a:t>
             </a:r>
           </a:p>
         </p:txBody>
@@ -2906,7 +2906,7 @@
           <a:lstStyle/>
           <a:p>
             <a:r>
-              <a:t>3.2) 広島</a:t>
+              <a:t>3.3) 広島</a:t>
             </a:r>
           </a:p>
         </p:txBody>
@@ -7319,7 +7319,7 @@
           <a:lstStyle/>
           <a:p>
             <a:r>
-              <a:t>3) 本州</a:t>
+              <a:t>3.1) 本州</a:t>
             </a:r>
           </a:p>
         </p:txBody>
